--- a/ContinuationProject/WorkingFolder/LineStyles.pptx
+++ b/ContinuationProject/WorkingFolder/LineStyles.pptx
@@ -225,7 +225,7 @@
             <a:fld id="{4AA9FAFC-2319-504C-A7E6-C27BB7BBEBBC}" type="datetimeFigureOut">
               <a:rPr lang="mr-IN"/>
               <a:pPr/>
-              <a:t>13-10-2025</a:t>
+              <a:t>17-10-2025</a:t>
             </a:fld>
             <a:endParaRPr lang="mr-IN"/>
           </a:p>
@@ -1265,7 +1265,7 @@
             <a:fld id="{C8927868-526A-4C6B-96A5-2F672AB9D3F4}" type="datetimeFigureOut">
               <a:rPr lang="en-US" smtClean="0"/>
               <a:pPr/>
-              <a:t>10/13/2025</a:t>
+              <a:t>10/17/2025</a:t>
             </a:fld>
             <a:endParaRPr lang="en-US"/>
           </a:p>
@@ -4050,7 +4050,7 @@
         </p:nvSpPr>
         <p:spPr>
           <a:xfrm>
-            <a:off x="304799" y="979715"/>
+            <a:off x="203637" y="909548"/>
             <a:ext cx="8736725" cy="4026626"/>
           </a:xfrm>
         </p:spPr>
@@ -4127,6 +4127,64 @@
               <a:rPr lang="en-US" sz="1400" dirty="0"/>
               <a:t> to include symbol in pattern</a:t>
             </a:r>
+          </a:p>
+          <a:p>
+            <a:pPr lvl="1"/>
+            <a:endParaRPr lang="en-US" sz="1400" dirty="0"/>
+          </a:p>
+          <a:p>
+            <a:pPr lvl="1"/>
+            <a:r>
+              <a:rPr lang="en-US" sz="1400" dirty="0" err="1"/>
+              <a:t>Linecap</a:t>
+            </a:r>
+            <a:endParaRPr lang="en-US" sz="1400" dirty="0"/>
+          </a:p>
+          <a:p>
+            <a:pPr lvl="1"/>
+            <a:r>
+              <a:rPr lang="en-US" sz="1400" dirty="0"/>
+              <a:t>Scaling of line – scale the markup as well ?</a:t>
+            </a:r>
+          </a:p>
+          <a:p>
+            <a:pPr lvl="1"/>
+            <a:r>
+              <a:rPr lang="en-US" sz="1400" dirty="0"/>
+              <a:t>Dash pattern []</a:t>
+            </a:r>
+          </a:p>
+          <a:p>
+            <a:pPr lvl="1"/>
+            <a:r>
+              <a:rPr lang="en-US" sz="1400" dirty="0"/>
+              <a:t>Markup pattern:</a:t>
+            </a:r>
+          </a:p>
+          <a:p>
+            <a:pPr lvl="2"/>
+            <a:r>
+              <a:rPr lang="en-US" sz="1400" dirty="0"/>
+              <a:t>Symbol primitive definition - </a:t>
+            </a:r>
+          </a:p>
+          <a:p>
+            <a:pPr lvl="2"/>
+            <a:r>
+              <a:rPr lang="en-US" sz="1400" dirty="0"/>
+              <a:t>Symbol distance: 8</a:t>
+            </a:r>
+          </a:p>
+          <a:p>
+            <a:pPr lvl="2"/>
+            <a:r>
+              <a:rPr lang="en-US" sz="1400" dirty="0"/>
+              <a:t>Start offset: 6.5</a:t>
+            </a:r>
+          </a:p>
+          <a:p>
+            <a:pPr lvl="2"/>
+            <a:endParaRPr lang="en-US" sz="1400" dirty="0"/>
           </a:p>
           <a:p>
             <a:pPr marL="0" indent="0">
@@ -4160,6 +4218,39 @@
           <a:xfrm>
             <a:off x="4875112" y="909548"/>
             <a:ext cx="3065096" cy="4096792"/>
+          </a:xfrm>
+          <a:prstGeom prst="rect">
+            <a:avLst/>
+          </a:prstGeom>
+        </p:spPr>
+      </p:pic>
+      <p:pic>
+        <p:nvPicPr>
+          <p:cNvPr id="3" name="Object 2">
+            <a:extLst>
+              <a:ext uri="{63B3BB69-23CF-44E3-9099-C40C66FF867C}">
+                <a14:compatExt xmlns:a14="http://schemas.microsoft.com/office/drawing/2010/main" spid="_x0000_s1026"/>
+              </a:ext>
+              <a:ext uri="{FF2B5EF4-FFF2-40B4-BE49-F238E27FC236}">
+                <a16:creationId xmlns:a16="http://schemas.microsoft.com/office/drawing/2014/main" id="{00000000-0008-0000-0000-000002040000}"/>
+              </a:ext>
+            </a:extLst>
+          </p:cNvPr>
+          <p:cNvPicPr>
+            <a:picLocks noChangeAspect="1"/>
+          </p:cNvPicPr>
+          <p:nvPr/>
+        </p:nvPicPr>
+        <p:blipFill>
+          <a:blip r:embed="rId3"/>
+          <a:stretch>
+            <a:fillRect/>
+          </a:stretch>
+        </p:blipFill>
+        <p:spPr>
+          <a:xfrm>
+            <a:off x="2831374" y="1705928"/>
+            <a:ext cx="1133475" cy="314325"/>
           </a:xfrm>
           <a:prstGeom prst="rect">
             <a:avLst/>
@@ -4264,8 +4355,54 @@
           <a:p>
             <a:r>
               <a:rPr lang="en-US" dirty="0"/>
-              <a:t>add</a:t>
-            </a:r>
+              <a:t>Do not copy the features of </a:t>
+            </a:r>
+            <a:r>
+              <a:rPr lang="en-US" dirty="0" err="1"/>
+              <a:t>svg</a:t>
+            </a:r>
+            <a:r>
+              <a:rPr lang="en-US" dirty="0"/>
+              <a:t>.</a:t>
+            </a:r>
+          </a:p>
+          <a:p>
+            <a:r>
+              <a:rPr lang="en-US" dirty="0"/>
+              <a:t>Need to cover:</a:t>
+            </a:r>
+          </a:p>
+          <a:p>
+            <a:pPr lvl="1"/>
+            <a:r>
+              <a:rPr lang="en-US" dirty="0"/>
+              <a:t>Sub-symbol </a:t>
+            </a:r>
+          </a:p>
+          <a:p>
+            <a:pPr lvl="1"/>
+            <a:r>
+              <a:rPr lang="en-US" dirty="0"/>
+              <a:t>Repeating pattern to include dash/dot/sub-symbol</a:t>
+            </a:r>
+          </a:p>
+          <a:p>
+            <a:pPr lvl="1"/>
+            <a:r>
+              <a:rPr lang="en-US" dirty="0"/>
+              <a:t>Line caps</a:t>
+            </a:r>
+          </a:p>
+          <a:p>
+            <a:pPr lvl="1"/>
+            <a:r>
+              <a:rPr lang="en-US" dirty="0"/>
+              <a:t>Double lines (multi-line?)</a:t>
+            </a:r>
+          </a:p>
+          <a:p>
+            <a:pPr lvl="1"/>
+            <a:endParaRPr lang="en-US" dirty="0"/>
           </a:p>
         </p:txBody>
       </p:sp>
